--- a/Design-to-Delivery.pptx
+++ b/Design-to-Delivery.pptx
@@ -1542,7 +1542,7 @@
                 <a:ea typeface="Calibri" pitchFamily="34" charset="-122"/>
                 <a:cs typeface="Calibri" pitchFamily="34" charset="-120"/>
               </a:rPr>
-              <a:t>Submission by Bhanuja Kumar ·  University of Liverpool  · CXI+AI ·  March 2026</a:t>
+              <a:t>Submitted by Bhanuja Kumar ·  University of Liverpool  · CXI+AI ·  March 2026</a:t>
             </a:r>
             <a:endParaRPr lang="en-US" sz="1200" dirty="0"/>
           </a:p>
@@ -3428,7 +3428,7 @@
         </p:nvSpPr>
         <p:spPr>
           <a:xfrm>
-            <a:off x="1938528" y="2587752"/>
+            <a:off x="1969264" y="2587752"/>
             <a:ext cx="201168" cy="36576"/>
           </a:xfrm>
           <a:prstGeom prst="rect">
@@ -3460,7 +3460,7 @@
         </p:nvSpPr>
         <p:spPr>
           <a:xfrm>
-            <a:off x="2066544" y="2514600"/>
+            <a:off x="2151068" y="2514600"/>
             <a:ext cx="128016" cy="182880"/>
           </a:xfrm>
           <a:prstGeom prst="rect">
@@ -3499,7 +3499,7 @@
         </p:nvSpPr>
         <p:spPr>
           <a:xfrm>
-            <a:off x="2176272" y="1920240"/>
+            <a:off x="2268480" y="1920240"/>
             <a:ext cx="1463040" cy="1691640"/>
           </a:xfrm>
           <a:prstGeom prst="rect">
@@ -3538,7 +3538,7 @@
         </p:nvSpPr>
         <p:spPr>
           <a:xfrm>
-            <a:off x="2176272" y="1920240"/>
+            <a:off x="2268480" y="1920240"/>
             <a:ext cx="1463040" cy="64008"/>
           </a:xfrm>
           <a:prstGeom prst="rect">
@@ -3570,7 +3570,7 @@
         </p:nvSpPr>
         <p:spPr>
           <a:xfrm>
-            <a:off x="2240280" y="2029968"/>
+            <a:off x="2332488" y="2029968"/>
             <a:ext cx="1335024" cy="1097280"/>
           </a:xfrm>
           <a:prstGeom prst="rect">
@@ -3652,7 +3652,7 @@
         </p:nvSpPr>
         <p:spPr>
           <a:xfrm>
-            <a:off x="2240280" y="2980944"/>
+            <a:off x="2314200" y="3073908"/>
             <a:ext cx="1335024" cy="256032"/>
           </a:xfrm>
           <a:prstGeom prst="rect">
@@ -3691,8 +3691,8 @@
         </p:nvSpPr>
         <p:spPr>
           <a:xfrm>
-            <a:off x="3657600" y="2587752"/>
-            <a:ext cx="201168" cy="36576"/>
+            <a:off x="5331392" y="2514600"/>
+            <a:ext cx="244604" cy="45719"/>
           </a:xfrm>
           <a:prstGeom prst="rect">
             <a:avLst/>
@@ -3723,8 +3723,8 @@
         </p:nvSpPr>
         <p:spPr>
           <a:xfrm>
-            <a:off x="3785616" y="2514600"/>
-            <a:ext cx="128016" cy="182880"/>
+            <a:off x="5479568" y="2289809"/>
+            <a:ext cx="300432" cy="495300"/>
           </a:xfrm>
           <a:prstGeom prst="rect">
             <a:avLst/>
@@ -3756,14 +3756,14 @@
       </p:sp>
       <p:sp>
         <p:nvSpPr>
-          <p:cNvPr id="18" name="Shape 16"/>
-          <p:cNvSpPr/>
-          <p:nvPr/>
-        </p:nvSpPr>
-        <p:spPr>
-          <a:xfrm>
-            <a:off x="3895344" y="1920240"/>
-            <a:ext cx="1463040" cy="1417320"/>
+          <p:cNvPr id="23" name="Shape 21"/>
+          <p:cNvSpPr/>
+          <p:nvPr/>
+        </p:nvSpPr>
+        <p:spPr>
+          <a:xfrm>
+            <a:off x="5724528" y="1920240"/>
+            <a:ext cx="1298840" cy="1417320"/>
           </a:xfrm>
           <a:prstGeom prst="rect">
             <a:avLst/>
@@ -3795,13 +3795,13 @@
       </p:sp>
       <p:sp>
         <p:nvSpPr>
-          <p:cNvPr id="19" name="Text 17"/>
-          <p:cNvSpPr/>
-          <p:nvPr/>
-        </p:nvSpPr>
-        <p:spPr>
-          <a:xfrm>
-            <a:off x="3959352" y="1993392"/>
+          <p:cNvPr id="24" name="Text 22"/>
+          <p:cNvSpPr/>
+          <p:nvPr/>
+        </p:nvSpPr>
+        <p:spPr>
+          <a:xfrm>
+            <a:off x="5724528" y="1993392"/>
             <a:ext cx="1335024" cy="868680"/>
           </a:xfrm>
           <a:prstGeom prst="rect">
@@ -3829,41 +3829,21 @@
                 <a:ea typeface="Trebuchet MS" pitchFamily="34" charset="-122"/>
                 <a:cs typeface="Trebuchet MS" pitchFamily="34" charset="-120"/>
               </a:rPr>
-              <a:t>Enriched</a:t>
+              <a:t>Enriched Brief</a:t>
             </a:r>
             <a:endParaRPr lang="en-US" sz="1000" dirty="0"/>
           </a:p>
-          <a:p>
-            <a:pPr marL="0" indent="0" algn="ctr">
-              <a:lnSpc>
-                <a:spcPct val="120000"/>
-              </a:lnSpc>
-              <a:buNone/>
-            </a:pPr>
-            <a:r>
-              <a:rPr lang="en-US" sz="1000" dirty="0">
-                <a:solidFill>
-                  <a:srgbClr val="FFFFFF"/>
-                </a:solidFill>
-                <a:latin typeface="Trebuchet MS" pitchFamily="34" charset="0"/>
-                <a:ea typeface="Trebuchet MS" pitchFamily="34" charset="-122"/>
-                <a:cs typeface="Trebuchet MS" pitchFamily="34" charset="-120"/>
-              </a:rPr>
-              <a:t>Prompt</a:t>
-            </a:r>
-            <a:endParaRPr lang="en-US" sz="1000" dirty="0"/>
-          </a:p>
-        </p:txBody>
-      </p:sp>
-      <p:sp>
-        <p:nvSpPr>
-          <p:cNvPr id="20" name="Text 18"/>
-          <p:cNvSpPr/>
-          <p:nvPr/>
-        </p:nvSpPr>
-        <p:spPr>
-          <a:xfrm>
-            <a:off x="3959352" y="2706624"/>
+        </p:txBody>
+      </p:sp>
+      <p:sp>
+        <p:nvSpPr>
+          <p:cNvPr id="25" name="Text 23"/>
+          <p:cNvSpPr/>
+          <p:nvPr/>
+        </p:nvSpPr>
+        <p:spPr>
+          <a:xfrm>
+            <a:off x="5724528" y="2706624"/>
             <a:ext cx="1335024" cy="256032"/>
           </a:xfrm>
           <a:prstGeom prst="rect">
@@ -3888,7 +3868,7 @@
                 <a:ea typeface="Calibri" pitchFamily="34" charset="-122"/>
                 <a:cs typeface="Calibri" pitchFamily="34" charset="-120"/>
               </a:rPr>
-              <a:t>+ context + flags</a:t>
+              <a:t>generation</a:t>
             </a:r>
             <a:endParaRPr lang="en-US" sz="800" dirty="0"/>
           </a:p>
@@ -3896,85 +3876,14 @@
       </p:sp>
       <p:sp>
         <p:nvSpPr>
-          <p:cNvPr id="21" name="Shape 19"/>
-          <p:cNvSpPr/>
-          <p:nvPr/>
-        </p:nvSpPr>
-        <p:spPr>
-          <a:xfrm>
-            <a:off x="5376672" y="2587752"/>
-            <a:ext cx="201168" cy="36576"/>
-          </a:xfrm>
-          <a:prstGeom prst="rect">
-            <a:avLst/>
-          </a:prstGeom>
-          <a:solidFill>
-            <a:srgbClr val="B0BFD0"/>
-          </a:solidFill>
-          <a:ln w="12700">
-            <a:solidFill>
-              <a:srgbClr val="B0BFD0"/>
-            </a:solidFill>
-            <a:prstDash val="solid"/>
-          </a:ln>
-        </p:spPr>
-        <p:txBody>
-          <a:bodyPr/>
-          <a:lstStyle/>
-          <a:p>
-            <a:endParaRPr lang="en-IN"/>
-          </a:p>
-        </p:txBody>
-      </p:sp>
-      <p:sp>
-        <p:nvSpPr>
-          <p:cNvPr id="22" name="Text 20"/>
-          <p:cNvSpPr/>
-          <p:nvPr/>
-        </p:nvSpPr>
-        <p:spPr>
-          <a:xfrm>
-            <a:off x="5504688" y="2514600"/>
-            <a:ext cx="128016" cy="182880"/>
-          </a:xfrm>
-          <a:prstGeom prst="rect">
-            <a:avLst/>
-          </a:prstGeom>
-          <a:noFill/>
-          <a:ln/>
-        </p:spPr>
-        <p:txBody>
-          <a:bodyPr wrap="square" lIns="0" tIns="0" rIns="0" bIns="0" rtlCol="0" anchor="ctr"/>
-          <a:lstStyle/>
-          <a:p>
-            <a:pPr marL="0" indent="0" algn="ctr">
-              <a:buNone/>
-            </a:pPr>
-            <a:r>
-              <a:rPr lang="en-US" sz="800" dirty="0">
-                <a:solidFill>
-                  <a:srgbClr val="B0BFD0"/>
-                </a:solidFill>
-                <a:latin typeface="Calibri" pitchFamily="34" charset="0"/>
-                <a:ea typeface="Calibri" pitchFamily="34" charset="-122"/>
-                <a:cs typeface="Calibri" pitchFamily="34" charset="-120"/>
-              </a:rPr>
-              <a:t>▶</a:t>
-            </a:r>
-            <a:endParaRPr lang="en-US" sz="800" dirty="0"/>
-          </a:p>
-        </p:txBody>
-      </p:sp>
-      <p:sp>
-        <p:nvSpPr>
-          <p:cNvPr id="23" name="Shape 21"/>
-          <p:cNvSpPr/>
-          <p:nvPr/>
-        </p:nvSpPr>
-        <p:spPr>
-          <a:xfrm>
-            <a:off x="5614416" y="1920240"/>
-            <a:ext cx="1463040" cy="1417320"/>
+          <p:cNvPr id="28" name="Shape 26"/>
+          <p:cNvSpPr/>
+          <p:nvPr/>
+        </p:nvSpPr>
+        <p:spPr>
+          <a:xfrm>
+            <a:off x="7443608" y="1920240"/>
+            <a:ext cx="1288912" cy="1417320"/>
           </a:xfrm>
           <a:prstGeom prst="rect">
             <a:avLst/>
@@ -4006,13 +3915,13 @@
       </p:sp>
       <p:sp>
         <p:nvSpPr>
-          <p:cNvPr id="24" name="Text 22"/>
-          <p:cNvSpPr/>
-          <p:nvPr/>
-        </p:nvSpPr>
-        <p:spPr>
-          <a:xfrm>
-            <a:off x="5678424" y="1993392"/>
+          <p:cNvPr id="29" name="Text 27"/>
+          <p:cNvSpPr/>
+          <p:nvPr/>
+        </p:nvSpPr>
+        <p:spPr>
+          <a:xfrm>
+            <a:off x="7397496" y="1993392"/>
             <a:ext cx="1335024" cy="868680"/>
           </a:xfrm>
           <a:prstGeom prst="rect">
@@ -4040,7 +3949,7 @@
                 <a:ea typeface="Trebuchet MS" pitchFamily="34" charset="-122"/>
                 <a:cs typeface="Trebuchet MS" pitchFamily="34" charset="-120"/>
               </a:rPr>
-              <a:t>LLM</a:t>
+              <a:t>Scored</a:t>
             </a:r>
             <a:endParaRPr lang="en-US" sz="1000" dirty="0"/>
           </a:p>
@@ -4060,41 +3969,21 @@
                 <a:ea typeface="Trebuchet MS" pitchFamily="34" charset="-122"/>
                 <a:cs typeface="Trebuchet MS" pitchFamily="34" charset="-120"/>
               </a:rPr>
-              <a:t>(Mistral/</a:t>
+              <a:t>Brief</a:t>
             </a:r>
             <a:endParaRPr lang="en-US" sz="1000" dirty="0"/>
           </a:p>
-          <a:p>
-            <a:pPr marL="0" indent="0" algn="ctr">
-              <a:lnSpc>
-                <a:spcPct val="120000"/>
-              </a:lnSpc>
-              <a:buNone/>
-            </a:pPr>
-            <a:r>
-              <a:rPr lang="en-US" sz="1000" dirty="0">
-                <a:solidFill>
-                  <a:srgbClr val="FFFFFF"/>
-                </a:solidFill>
-                <a:latin typeface="Trebuchet MS" pitchFamily="34" charset="0"/>
-                <a:ea typeface="Trebuchet MS" pitchFamily="34" charset="-122"/>
-                <a:cs typeface="Trebuchet MS" pitchFamily="34" charset="-120"/>
-              </a:rPr>
-              <a:t>Claude)</a:t>
-            </a:r>
-            <a:endParaRPr lang="en-US" sz="1000" dirty="0"/>
-          </a:p>
-        </p:txBody>
-      </p:sp>
-      <p:sp>
-        <p:nvSpPr>
-          <p:cNvPr id="25" name="Text 23"/>
-          <p:cNvSpPr/>
-          <p:nvPr/>
-        </p:nvSpPr>
-        <p:spPr>
-          <a:xfrm>
-            <a:off x="5678424" y="2706624"/>
+        </p:txBody>
+      </p:sp>
+      <p:sp>
+        <p:nvSpPr>
+          <p:cNvPr id="30" name="Text 28"/>
+          <p:cNvSpPr/>
+          <p:nvPr/>
+        </p:nvSpPr>
+        <p:spPr>
+          <a:xfrm>
+            <a:off x="7397496" y="2706624"/>
             <a:ext cx="1335024" cy="256032"/>
           </a:xfrm>
           <a:prstGeom prst="rect">
@@ -4119,7 +4008,7 @@
                 <a:ea typeface="Calibri" pitchFamily="34" charset="-122"/>
                 <a:cs typeface="Calibri" pitchFamily="34" charset="-120"/>
               </a:rPr>
-              <a:t>generation</a:t>
+              <a:t>explained output</a:t>
             </a:r>
             <a:endParaRPr lang="en-US" sz="800" dirty="0"/>
           </a:p>
@@ -4127,24 +4016,63 @@
       </p:sp>
       <p:sp>
         <p:nvSpPr>
-          <p:cNvPr id="26" name="Shape 24"/>
-          <p:cNvSpPr/>
-          <p:nvPr/>
-        </p:nvSpPr>
-        <p:spPr>
-          <a:xfrm>
-            <a:off x="7095744" y="2587752"/>
-            <a:ext cx="201168" cy="36576"/>
-          </a:xfrm>
-          <a:prstGeom prst="rect">
-            <a:avLst/>
-          </a:prstGeom>
-          <a:solidFill>
-            <a:srgbClr val="B0BFD0"/>
+          <p:cNvPr id="31" name="Text 29"/>
+          <p:cNvSpPr/>
+          <p:nvPr/>
+        </p:nvSpPr>
+        <p:spPr>
+          <a:xfrm>
+            <a:off x="457200" y="3977640"/>
+            <a:ext cx="8229600" cy="274320"/>
+          </a:xfrm>
+          <a:prstGeom prst="rect">
+            <a:avLst/>
+          </a:prstGeom>
+          <a:noFill/>
+          <a:ln/>
+        </p:spPr>
+        <p:txBody>
+          <a:bodyPr wrap="square" lIns="0" tIns="0" rIns="0" bIns="0" rtlCol="0" anchor="ctr"/>
+          <a:lstStyle/>
+          <a:p>
+            <a:pPr marL="0" indent="0" algn="ctr">
+              <a:buNone/>
+            </a:pPr>
+            <a:r>
+              <a:rPr lang="en-US" sz="1100" i="1" dirty="0">
+                <a:solidFill>
+                  <a:srgbClr val="D6EEF9"/>
+                </a:solidFill>
+                <a:latin typeface="Calibri Light" pitchFamily="34" charset="0"/>
+                <a:ea typeface="Calibri Light" pitchFamily="34" charset="-122"/>
+                <a:cs typeface="Calibri Light" pitchFamily="34" charset="-120"/>
+              </a:rPr>
+              <a:t>This is where Data Science adds value — measurable, explainable, repeatable.</a:t>
+            </a:r>
+            <a:endParaRPr lang="en-US" sz="1100" dirty="0"/>
+          </a:p>
+        </p:txBody>
+      </p:sp>
+      <p:sp>
+        <p:nvSpPr>
+          <p:cNvPr id="32" name="Shape 30"/>
+          <p:cNvSpPr/>
+          <p:nvPr/>
+        </p:nvSpPr>
+        <p:spPr>
+          <a:xfrm>
+            <a:off x="0" y="4983480"/>
+            <a:ext cx="9144000" cy="160020"/>
+          </a:xfrm>
+          <a:prstGeom prst="rect">
+            <a:avLst/>
+          </a:prstGeom>
+          <a:solidFill>
+            <a:srgbClr val="003087"/>
           </a:solidFill>
           <a:ln w="12700">
             <a:solidFill>
-              <a:srgbClr val="B0BFD0"/>
+              <a:srgbClr val="003087"/>
             </a:solidFill>
             <a:prstDash val="solid"/>
           </a:ln>
@@ -4159,63 +4087,69 @@
       </p:sp>
       <p:sp>
         <p:nvSpPr>
-          <p:cNvPr id="27" name="Text 25"/>
-          <p:cNvSpPr/>
-          <p:nvPr/>
-        </p:nvSpPr>
-        <p:spPr>
-          <a:xfrm>
-            <a:off x="7223760" y="2514600"/>
-            <a:ext cx="128016" cy="182880"/>
-          </a:xfrm>
-          <a:prstGeom prst="rect">
-            <a:avLst/>
-          </a:prstGeom>
-          <a:noFill/>
-          <a:ln/>
-        </p:spPr>
-        <p:txBody>
-          <a:bodyPr wrap="square" lIns="0" tIns="0" rIns="0" bIns="0" rtlCol="0" anchor="ctr"/>
-          <a:lstStyle/>
-          <a:p>
-            <a:pPr marL="0" indent="0" algn="ctr">
-              <a:buNone/>
-            </a:pPr>
-            <a:r>
-              <a:rPr lang="en-US" sz="800" dirty="0">
-                <a:solidFill>
-                  <a:srgbClr val="B0BFD0"/>
+          <p:cNvPr id="33" name="Text 31"/>
+          <p:cNvSpPr/>
+          <p:nvPr/>
+        </p:nvSpPr>
+        <p:spPr>
+          <a:xfrm>
+            <a:off x="274320" y="4983480"/>
+            <a:ext cx="8595360" cy="160020"/>
+          </a:xfrm>
+          <a:prstGeom prst="rect">
+            <a:avLst/>
+          </a:prstGeom>
+          <a:noFill/>
+          <a:ln/>
+        </p:spPr>
+        <p:txBody>
+          <a:bodyPr wrap="square" lIns="0" tIns="0" rIns="0" bIns="0" rtlCol="0" anchor="ctr"/>
+          <a:lstStyle/>
+          <a:p>
+            <a:pPr marL="0" indent="0">
+              <a:buNone/>
+            </a:pPr>
+            <a:r>
+              <a:rPr lang="en-US" sz="750" dirty="0">
+                <a:solidFill>
+                  <a:srgbClr val="D6EEF9"/>
                 </a:solidFill>
                 <a:latin typeface="Calibri" pitchFamily="34" charset="0"/>
                 <a:ea typeface="Calibri" pitchFamily="34" charset="-122"/>
                 <a:cs typeface="Calibri" pitchFamily="34" charset="-120"/>
               </a:rPr>
-              <a:t>▶</a:t>
-            </a:r>
-            <a:endParaRPr lang="en-US" sz="800" dirty="0"/>
-          </a:p>
-        </p:txBody>
-      </p:sp>
-      <p:sp>
-        <p:nvSpPr>
-          <p:cNvPr id="28" name="Shape 26"/>
-          <p:cNvSpPr/>
-          <p:nvPr/>
-        </p:nvSpPr>
-        <p:spPr>
-          <a:xfrm>
-            <a:off x="7333488" y="1920240"/>
-            <a:ext cx="1463040" cy="1417320"/>
-          </a:xfrm>
-          <a:prstGeom prst="rect">
-            <a:avLst/>
-          </a:prstGeom>
-          <a:solidFill>
-            <a:srgbClr val="003087"/>
+              <a:t>CXI+AI  ·  University of Liverpool Hackathon</a:t>
+            </a:r>
+            <a:endParaRPr lang="en-US" sz="750" dirty="0"/>
+          </a:p>
+        </p:txBody>
+      </p:sp>
+      <p:sp>
+        <p:nvSpPr>
+          <p:cNvPr id="34" name="Shape 10">
+            <a:extLst>
+              <a:ext uri="{FF2B5EF4-FFF2-40B4-BE49-F238E27FC236}">
+                <a16:creationId xmlns:a16="http://schemas.microsoft.com/office/drawing/2014/main" id="{0BE5D02F-2F96-17C6-3310-569453504E11}"/>
+              </a:ext>
+            </a:extLst>
+          </p:cNvPr>
+          <p:cNvSpPr/>
+          <p:nvPr/>
+        </p:nvSpPr>
+        <p:spPr>
+          <a:xfrm>
+            <a:off x="3841248" y="1914144"/>
+            <a:ext cx="1463040" cy="1691640"/>
+          </a:xfrm>
+          <a:prstGeom prst="rect">
+            <a:avLst/>
+          </a:prstGeom>
+          <a:solidFill>
+            <a:srgbClr val="0093D0"/>
           </a:solidFill>
           <a:ln w="6350">
             <a:solidFill>
-              <a:srgbClr val="003087"/>
+              <a:srgbClr val="0093D0"/>
             </a:solidFill>
             <a:prstDash val="solid"/>
           </a:ln>
@@ -4237,14 +4171,58 @@
       </p:sp>
       <p:sp>
         <p:nvSpPr>
-          <p:cNvPr id="29" name="Text 27"/>
-          <p:cNvSpPr/>
-          <p:nvPr/>
-        </p:nvSpPr>
-        <p:spPr>
-          <a:xfrm>
-            <a:off x="7397496" y="1993392"/>
-            <a:ext cx="1335024" cy="868680"/>
+          <p:cNvPr id="35" name="Shape 11">
+            <a:extLst>
+              <a:ext uri="{FF2B5EF4-FFF2-40B4-BE49-F238E27FC236}">
+                <a16:creationId xmlns:a16="http://schemas.microsoft.com/office/drawing/2014/main" id="{F942ADC3-FC6A-E9BF-72EA-20C1406504B2}"/>
+              </a:ext>
+            </a:extLst>
+          </p:cNvPr>
+          <p:cNvSpPr/>
+          <p:nvPr/>
+        </p:nvSpPr>
+        <p:spPr>
+          <a:xfrm>
+            <a:off x="3838200" y="1912620"/>
+            <a:ext cx="1463040" cy="64008"/>
+          </a:xfrm>
+          <a:prstGeom prst="rect">
+            <a:avLst/>
+          </a:prstGeom>
+          <a:solidFill>
+            <a:srgbClr val="00C9A7"/>
+          </a:solidFill>
+          <a:ln w="12700">
+            <a:solidFill>
+              <a:srgbClr val="00C9A7"/>
+            </a:solidFill>
+            <a:prstDash val="solid"/>
+          </a:ln>
+        </p:spPr>
+        <p:txBody>
+          <a:bodyPr/>
+          <a:lstStyle/>
+          <a:p>
+            <a:endParaRPr lang="en-IN"/>
+          </a:p>
+        </p:txBody>
+      </p:sp>
+      <p:sp>
+        <p:nvSpPr>
+          <p:cNvPr id="36" name="Text 12">
+            <a:extLst>
+              <a:ext uri="{FF2B5EF4-FFF2-40B4-BE49-F238E27FC236}">
+                <a16:creationId xmlns:a16="http://schemas.microsoft.com/office/drawing/2014/main" id="{25B4FA86-1322-D544-7004-58BBA24ED43C}"/>
+              </a:ext>
+            </a:extLst>
+          </p:cNvPr>
+          <p:cNvSpPr/>
+          <p:nvPr/>
+        </p:nvSpPr>
+        <p:spPr>
+          <a:xfrm>
+            <a:off x="3870966" y="2081784"/>
+            <a:ext cx="1335024" cy="1097280"/>
           </a:xfrm>
           <a:prstGeom prst="rect">
             <a:avLst/>
@@ -4263,7 +4241,7 @@
               <a:buNone/>
             </a:pPr>
             <a:r>
-              <a:rPr lang="en-US" sz="1000" dirty="0">
+              <a:rPr lang="en-US" sz="1100" b="1" dirty="0">
                 <a:solidFill>
                   <a:srgbClr val="FFFFFF"/>
                 </a:solidFill>
@@ -4271,19 +4249,10 @@
                 <a:ea typeface="Trebuchet MS" pitchFamily="34" charset="-122"/>
                 <a:cs typeface="Trebuchet MS" pitchFamily="34" charset="-120"/>
               </a:rPr>
-              <a:t>Scored</a:t>
-            </a:r>
-            <a:endParaRPr lang="en-US" sz="1000" dirty="0"/>
-          </a:p>
-          <a:p>
-            <a:pPr marL="0" indent="0" algn="ctr">
-              <a:lnSpc>
-                <a:spcPct val="120000"/>
-              </a:lnSpc>
-              <a:buNone/>
-            </a:pPr>
-            <a:r>
-              <a:rPr lang="en-US" sz="1000" dirty="0">
+              <a:t>Retrieval-Augmented Generation</a:t>
+            </a:r>
+            <a:br>
+              <a:rPr lang="en-US" sz="1100" b="1" dirty="0">
                 <a:solidFill>
                   <a:srgbClr val="FFFFFF"/>
                 </a:solidFill>
@@ -4291,21 +4260,37 @@
                 <a:ea typeface="Trebuchet MS" pitchFamily="34" charset="-122"/>
                 <a:cs typeface="Trebuchet MS" pitchFamily="34" charset="-120"/>
               </a:rPr>
-              <a:t>Brief</a:t>
-            </a:r>
-            <a:endParaRPr lang="en-US" sz="1000" dirty="0"/>
-          </a:p>
-        </p:txBody>
-      </p:sp>
-      <p:sp>
-        <p:nvSpPr>
-          <p:cNvPr id="30" name="Text 28"/>
-          <p:cNvSpPr/>
-          <p:nvPr/>
-        </p:nvSpPr>
-        <p:spPr>
-          <a:xfrm>
-            <a:off x="7397496" y="2706624"/>
+            </a:br>
+            <a:r>
+              <a:rPr lang="en-US" sz="1100" b="1" dirty="0">
+                <a:solidFill>
+                  <a:srgbClr val="FFFFFF"/>
+                </a:solidFill>
+                <a:latin typeface="Trebuchet MS" pitchFamily="34" charset="0"/>
+                <a:ea typeface="Trebuchet MS" pitchFamily="34" charset="-122"/>
+                <a:cs typeface="Trebuchet MS" pitchFamily="34" charset="-120"/>
+              </a:rPr>
+              <a:t>(RAG)</a:t>
+            </a:r>
+            <a:endParaRPr lang="en-US" sz="1100" dirty="0"/>
+          </a:p>
+        </p:txBody>
+      </p:sp>
+      <p:sp>
+        <p:nvSpPr>
+          <p:cNvPr id="37" name="Text 13">
+            <a:extLst>
+              <a:ext uri="{FF2B5EF4-FFF2-40B4-BE49-F238E27FC236}">
+                <a16:creationId xmlns:a16="http://schemas.microsoft.com/office/drawing/2014/main" id="{1C89B628-698E-E1C6-2DA5-FA2D7DC5239E}"/>
+              </a:ext>
+            </a:extLst>
+          </p:cNvPr>
+          <p:cNvSpPr/>
+          <p:nvPr/>
+        </p:nvSpPr>
+        <p:spPr>
+          <a:xfrm>
+            <a:off x="3907542" y="3080004"/>
             <a:ext cx="1335024" cy="256032"/>
           </a:xfrm>
           <a:prstGeom prst="rect">
@@ -4324,13 +4309,13 @@
             <a:r>
               <a:rPr lang="en-US" sz="800" dirty="0">
                 <a:solidFill>
-                  <a:srgbClr val="D6EEF9"/>
+                  <a:srgbClr val="001A4D"/>
                 </a:solidFill>
                 <a:latin typeface="Calibri" pitchFamily="34" charset="0"/>
                 <a:ea typeface="Calibri" pitchFamily="34" charset="-122"/>
                 <a:cs typeface="Calibri" pitchFamily="34" charset="-120"/>
               </a:rPr>
-              <a:t>explained output</a:t>
+              <a:t>Text</a:t>
             </a:r>
             <a:endParaRPr lang="en-US" sz="800" dirty="0"/>
           </a:p>
@@ -4338,63 +4323,30 @@
       </p:sp>
       <p:sp>
         <p:nvSpPr>
-          <p:cNvPr id="31" name="Text 29"/>
-          <p:cNvSpPr/>
-          <p:nvPr/>
-        </p:nvSpPr>
-        <p:spPr>
-          <a:xfrm>
-            <a:off x="457200" y="3977640"/>
-            <a:ext cx="8229600" cy="274320"/>
-          </a:xfrm>
-          <a:prstGeom prst="rect">
-            <a:avLst/>
-          </a:prstGeom>
-          <a:noFill/>
-          <a:ln/>
-        </p:spPr>
-        <p:txBody>
-          <a:bodyPr wrap="square" lIns="0" tIns="0" rIns="0" bIns="0" rtlCol="0" anchor="ctr"/>
-          <a:lstStyle/>
-          <a:p>
-            <a:pPr marL="0" indent="0" algn="ctr">
-              <a:buNone/>
-            </a:pPr>
-            <a:r>
-              <a:rPr lang="en-US" sz="1100" i="1" dirty="0">
-                <a:solidFill>
-                  <a:srgbClr val="D6EEF9"/>
-                </a:solidFill>
-                <a:latin typeface="Calibri Light" pitchFamily="34" charset="0"/>
-                <a:ea typeface="Calibri Light" pitchFamily="34" charset="-122"/>
-                <a:cs typeface="Calibri Light" pitchFamily="34" charset="-120"/>
-              </a:rPr>
-              <a:t>This is where Data Science adds value — measurable, explainable, repeatable.</a:t>
-            </a:r>
-            <a:endParaRPr lang="en-US" sz="1100" dirty="0"/>
-          </a:p>
-        </p:txBody>
-      </p:sp>
-      <p:sp>
-        <p:nvSpPr>
-          <p:cNvPr id="32" name="Shape 30"/>
-          <p:cNvSpPr/>
-          <p:nvPr/>
-        </p:nvSpPr>
-        <p:spPr>
-          <a:xfrm>
-            <a:off x="0" y="4983480"/>
-            <a:ext cx="9144000" cy="160020"/>
-          </a:xfrm>
-          <a:prstGeom prst="rect">
-            <a:avLst/>
-          </a:prstGeom>
-          <a:solidFill>
-            <a:srgbClr val="003087"/>
+          <p:cNvPr id="40" name="Shape 14">
+            <a:extLst>
+              <a:ext uri="{FF2B5EF4-FFF2-40B4-BE49-F238E27FC236}">
+                <a16:creationId xmlns:a16="http://schemas.microsoft.com/office/drawing/2014/main" id="{B458C0F2-4A9A-DE5D-78CB-1C15A09D431A}"/>
+              </a:ext>
+            </a:extLst>
+          </p:cNvPr>
+          <p:cNvSpPr/>
+          <p:nvPr/>
+        </p:nvSpPr>
+        <p:spPr>
+          <a:xfrm>
+            <a:off x="7051328" y="2490268"/>
+            <a:ext cx="244604" cy="45719"/>
+          </a:xfrm>
+          <a:prstGeom prst="rect">
+            <a:avLst/>
+          </a:prstGeom>
+          <a:solidFill>
+            <a:srgbClr val="B0BFD0"/>
           </a:solidFill>
           <a:ln w="12700">
             <a:solidFill>
-              <a:srgbClr val="003087"/>
+              <a:srgbClr val="B0BFD0"/>
             </a:solidFill>
             <a:prstDash val="solid"/>
           </a:ln>
@@ -4409,40 +4361,46 @@
       </p:sp>
       <p:sp>
         <p:nvSpPr>
-          <p:cNvPr id="33" name="Text 31"/>
-          <p:cNvSpPr/>
-          <p:nvPr/>
-        </p:nvSpPr>
-        <p:spPr>
-          <a:xfrm>
-            <a:off x="274320" y="4983480"/>
-            <a:ext cx="8595360" cy="160020"/>
-          </a:xfrm>
-          <a:prstGeom prst="rect">
-            <a:avLst/>
-          </a:prstGeom>
-          <a:noFill/>
-          <a:ln/>
-        </p:spPr>
-        <p:txBody>
-          <a:bodyPr wrap="square" lIns="0" tIns="0" rIns="0" bIns="0" rtlCol="0" anchor="ctr"/>
-          <a:lstStyle/>
-          <a:p>
-            <a:pPr marL="0" indent="0">
-              <a:buNone/>
-            </a:pPr>
-            <a:r>
-              <a:rPr lang="en-US" sz="750" dirty="0">
-                <a:solidFill>
-                  <a:srgbClr val="D6EEF9"/>
+          <p:cNvPr id="41" name="Text 15">
+            <a:extLst>
+              <a:ext uri="{FF2B5EF4-FFF2-40B4-BE49-F238E27FC236}">
+                <a16:creationId xmlns:a16="http://schemas.microsoft.com/office/drawing/2014/main" id="{73F49B22-7617-F768-85E8-2C1B43C6A41F}"/>
+              </a:ext>
+            </a:extLst>
+          </p:cNvPr>
+          <p:cNvSpPr/>
+          <p:nvPr/>
+        </p:nvSpPr>
+        <p:spPr>
+          <a:xfrm>
+            <a:off x="7199504" y="2265477"/>
+            <a:ext cx="300432" cy="495300"/>
+          </a:xfrm>
+          <a:prstGeom prst="rect">
+            <a:avLst/>
+          </a:prstGeom>
+          <a:noFill/>
+          <a:ln/>
+        </p:spPr>
+        <p:txBody>
+          <a:bodyPr wrap="square" lIns="0" tIns="0" rIns="0" bIns="0" rtlCol="0" anchor="ctr"/>
+          <a:lstStyle/>
+          <a:p>
+            <a:pPr marL="0" indent="0" algn="ctr">
+              <a:buNone/>
+            </a:pPr>
+            <a:r>
+              <a:rPr lang="en-US" sz="800" dirty="0">
+                <a:solidFill>
+                  <a:srgbClr val="B0BFD0"/>
                 </a:solidFill>
                 <a:latin typeface="Calibri" pitchFamily="34" charset="0"/>
                 <a:ea typeface="Calibri" pitchFamily="34" charset="-122"/>
                 <a:cs typeface="Calibri" pitchFamily="34" charset="-120"/>
               </a:rPr>
-              <a:t>CXI+AI  ·  University of Liverpool Hackathon</a:t>
-            </a:r>
-            <a:endParaRPr lang="en-US" sz="750" dirty="0"/>
+              <a:t>▶</a:t>
+            </a:r>
+            <a:endParaRPr lang="en-US" sz="800" dirty="0"/>
           </a:p>
         </p:txBody>
       </p:sp>
@@ -7505,7 +7463,7 @@
               <a:buNone/>
             </a:pPr>
             <a:r>
-              <a:rPr lang="en-US" sz="850" dirty="0">
+              <a:rPr lang="en-US" sz="900" b="1" dirty="0">
                 <a:solidFill>
                   <a:srgbClr val="FFFFFF"/>
                 </a:solidFill>
@@ -7515,7 +7473,7 @@
               </a:rPr>
               <a:t>Enriched</a:t>
             </a:r>
-            <a:endParaRPr lang="en-US" sz="850" dirty="0"/>
+            <a:endParaRPr lang="en-US" sz="900" b="1" dirty="0"/>
           </a:p>
           <a:p>
             <a:pPr marL="0" indent="0" algn="ctr">
@@ -7525,7 +7483,7 @@
               <a:buNone/>
             </a:pPr>
             <a:r>
-              <a:rPr lang="en-US" sz="850" dirty="0">
+              <a:rPr lang="en-US" sz="900" b="1" dirty="0">
                 <a:solidFill>
                   <a:srgbClr val="FFFFFF"/>
                 </a:solidFill>
@@ -7535,7 +7493,7 @@
               </a:rPr>
               <a:t>Prompt</a:t>
             </a:r>
-            <a:endParaRPr lang="en-US" sz="850" dirty="0"/>
+            <a:endParaRPr lang="en-US" sz="900" b="1" dirty="0"/>
           </a:p>
         </p:txBody>
       </p:sp>
